--- a/passage-qlever/slides/QLever as a Passage backend.pptx
+++ b/passage-qlever/slides/QLever as a Passage backend.pptx
@@ -1136,7 +1136,7 @@
           <a:p>
             <a:r>
               <a:rPr lang="en-US" dirty="0"/>
-              <a:t>Two methodological notes, each of which cost a wrong conclusion first. "Warm" is two things — the JVM compiling the pipeline and the store's working set in memory — and conflating them hid a bad protocol; measured properly, the join comparison reversed. And a published Blazegraph scan-open figure turned out to have been measured on 187 triples out of eleven million, because its three-argument scan passes a null graph; it was withdrawn rather than corrected.</a:t>
+              <a:t>The explanation this slide used to give — a join is a sequence of point lookups, which suits a B-tree and not a block store — was not what the measurement said: the identical loop in C++ reaches Blazegraph’s figure, so what the published line attributed to the storage is mostly the JNI crossing, which only one of the two backends pays. Two further methodological notes, each of which cost a wrong conclusion first. "Warm" is two things — the JVM compiling the pipeline and the store's working set in memory — and conflating them hid a bad protocol; measured properly, the join comparison reversed. And a published Blazegraph scan-open figure turned out to have been measured on 187 triples out of eleven million, because its three-argument scan passes a null graph; it was withdrawn rather than corrected.</a:t>
             </a:r>
             <a:endParaRPr lang="en-US" dirty="0"/>
           </a:p>
@@ -10984,7 +10984,7 @@
         <p:spPr>
           <a:xfrm>
             <a:off x="660400" y="1358900"/>
-            <a:ext cx="10566400" cy="579567"/>
+            <a:ext cx="10566400" cy="652882"/>
           </a:xfrm>
           <a:prstGeom prst="rect">
             <a:avLst/>
@@ -11003,7 +11003,7 @@
               <a:buNone/>
             </a:pPr>
             <a:r>
-              <a:rPr lang="en-US" sz="1509" dirty="0">
+              <a:rPr lang="en-US" sz="1700" dirty="0">
                 <a:solidFill>
                   <a:srgbClr val="000000"/>
                 </a:solidFill>
@@ -11020,7 +11020,7 @@
               <a:buNone/>
             </a:pPr>
             <a:r>
-              <a:rPr lang="en-US" sz="1509" b="1" dirty="0">
+              <a:rPr lang="en-US" sz="1700" b="1" dirty="0">
                 <a:solidFill>
                   <a:srgbClr val="000000"/>
                 </a:solidFill>
@@ -11037,7 +11037,7 @@
               <a:buNone/>
             </a:pPr>
             <a:r>
-              <a:rPr lang="en-US" sz="1509" dirty="0">
+              <a:rPr lang="en-US" sz="1700" dirty="0">
                 <a:solidFill>
                   <a:srgbClr val="000000"/>
                 </a:solidFill>
@@ -11047,7 +11047,7 @@
               </a:rPr>
               <a:t>, each backend warmed to its plateau. First 200,000 solutions, median of five.</a:t>
             </a:r>
-            <a:endParaRPr lang="en-US" sz="1509" dirty="0"/>
+            <a:endParaRPr lang="en-US" sz="1700" dirty="0"/>
           </a:p>
         </p:txBody>
       </p:sp>
@@ -11066,7 +11066,7 @@
           </p:nvPr>
         </p:nvGraphicFramePr>
         <p:xfrm>
-          <a:off x="660400" y="2073754"/>
+          <a:off x="660400" y="2164182"/>
           <a:ext cx="10871200" cy="914400"/>
         </p:xfrm>
         <a:graphic>
@@ -11089,7 +11089,7 @@
                         <a:buNone/>
                       </a:pPr>
                       <a:r>
-                        <a:rPr lang="en-US" sz="1509" b="1" dirty="0">
+                        <a:rPr lang="en-US" sz="1700" b="1" dirty="0">
                           <a:solidFill>
                             <a:srgbClr val="FFFFFF"/>
                           </a:solidFill>
@@ -11099,14 +11099,14 @@
                         </a:rPr>
                         <a:t>solutions/s</a:t>
                       </a:r>
-                      <a:endParaRPr lang="en-US" sz="1509" dirty="0">
+                      <a:endParaRPr lang="en-US" sz="1700" dirty="0">
                         <a:latin typeface="Roboto" charset="0"/>
                         <a:ea typeface="Roboto" charset="0"/>
                         <a:cs typeface="Roboto" charset="0"/>
                       </a:endParaRPr>
                     </a:p>
                   </a:txBody>
-                  <a:tcPr marL="90191" marR="90191" marT="90191" marB="90191" anchor="ctr">
+                  <a:tcPr marL="101600" marR="101600" marT="101600" marB="101600" anchor="ctr">
                     <a:lnL w="6350" cap="flat" cmpd="sng" algn="ctr">
                       <a:solidFill>
                         <a:srgbClr val="BFBFBF"/>
@@ -11157,7 +11157,7 @@
                         <a:buNone/>
                       </a:pPr>
                       <a:r>
-                        <a:rPr lang="en-US" sz="1509" b="1" dirty="0">
+                        <a:rPr lang="en-US" sz="1700" b="1" dirty="0">
                           <a:solidFill>
                             <a:srgbClr val="FFFFFF"/>
                           </a:solidFill>
@@ -11167,14 +11167,14 @@
                         </a:rPr>
                         <a:t>QLever</a:t>
                       </a:r>
-                      <a:endParaRPr lang="en-US" sz="1509" dirty="0">
+                      <a:endParaRPr lang="en-US" sz="1700" dirty="0">
                         <a:latin typeface="Roboto" charset="0"/>
                         <a:ea typeface="Roboto" charset="0"/>
                         <a:cs typeface="Roboto" charset="0"/>
                       </a:endParaRPr>
                     </a:p>
                   </a:txBody>
-                  <a:tcPr marL="90191" marR="90191" marT="90191" marB="90191" anchor="ctr">
+                  <a:tcPr marL="101600" marR="101600" marT="101600" marB="101600" anchor="ctr">
                     <a:lnL w="6350" cap="flat" cmpd="sng" algn="ctr">
                       <a:solidFill>
                         <a:srgbClr val="BFBFBF"/>
@@ -11225,7 +11225,7 @@
                         <a:buNone/>
                       </a:pPr>
                       <a:r>
-                        <a:rPr lang="en-US" sz="1509" b="1" dirty="0">
+                        <a:rPr lang="en-US" sz="1700" b="1" dirty="0">
                           <a:solidFill>
                             <a:srgbClr val="FFFFFF"/>
                           </a:solidFill>
@@ -11235,14 +11235,14 @@
                         </a:rPr>
                         <a:t>Blazegraph</a:t>
                       </a:r>
-                      <a:endParaRPr lang="en-US" sz="1509" dirty="0">
+                      <a:endParaRPr lang="en-US" sz="1700" dirty="0">
                         <a:latin typeface="Roboto" charset="0"/>
                         <a:ea typeface="Roboto" charset="0"/>
                         <a:cs typeface="Roboto" charset="0"/>
                       </a:endParaRPr>
                     </a:p>
                   </a:txBody>
-                  <a:tcPr marL="90191" marR="90191" marT="90191" marB="90191" anchor="ctr">
+                  <a:tcPr marL="101600" marR="101600" marT="101600" marB="101600" anchor="ctr">
                     <a:lnL w="6350" cap="flat" cmpd="sng" algn="ctr">
                       <a:solidFill>
                         <a:srgbClr val="BFBFBF"/>
@@ -11292,14 +11292,14 @@
                       <a:pPr algn="r" indent="0" marL="0">
                         <a:buNone/>
                       </a:pPr>
-                      <a:endParaRPr lang="en-US" sz="1509" dirty="0">
+                      <a:endParaRPr lang="en-US" sz="1700" dirty="0">
                         <a:latin typeface="Roboto" charset="0"/>
                         <a:ea typeface="Roboto" charset="0"/>
                         <a:cs typeface="Roboto" charset="0"/>
                       </a:endParaRPr>
                     </a:p>
                   </a:txBody>
-                  <a:tcPr marL="90191" marR="90191" marT="90191" marB="90191" anchor="ctr">
+                  <a:tcPr marL="101600" marR="101600" marT="101600" marB="101600" anchor="ctr">
                     <a:lnL w="6350" cap="flat" cmpd="sng" algn="ctr">
                       <a:solidFill>
                         <a:srgbClr val="BFBFBF"/>
@@ -11352,7 +11352,7 @@
                         <a:buNone/>
                       </a:pPr>
                       <a:r>
-                        <a:rPr lang="en-US" sz="1509" dirty="0">
+                        <a:rPr lang="en-US" sz="1700" dirty="0">
                           <a:solidFill>
                             <a:srgbClr val="000000"/>
                           </a:solidFill>
@@ -11362,14 +11362,14 @@
                         </a:rPr>
                         <a:t>?s ?p ?o</a:t>
                       </a:r>
-                      <a:endParaRPr lang="en-US" sz="1509" dirty="0">
+                      <a:endParaRPr lang="en-US" sz="1700" dirty="0">
                         <a:latin typeface="Roboto" charset="0"/>
                         <a:ea typeface="Roboto" charset="0"/>
                         <a:cs typeface="Roboto" charset="0"/>
                       </a:endParaRPr>
                     </a:p>
                   </a:txBody>
-                  <a:tcPr marL="90191" marR="90191" marT="90191" marB="90191" anchor="ctr">
+                  <a:tcPr marL="101600" marR="101600" marT="101600" marB="101600" anchor="ctr">
                     <a:lnL w="6350" cap="flat" cmpd="sng" algn="ctr">
                       <a:solidFill>
                         <a:srgbClr val="BFBFBF"/>
@@ -11420,7 +11420,7 @@
                         <a:buNone/>
                       </a:pPr>
                       <a:r>
-                        <a:rPr lang="en-US" sz="1509" b="1" dirty="0">
+                        <a:rPr lang="en-US" sz="1700" b="1" dirty="0">
                           <a:solidFill>
                             <a:srgbClr val="000000"/>
                           </a:solidFill>
@@ -11430,14 +11430,14 @@
                         </a:rPr>
                         <a:t>5,405,405</a:t>
                       </a:r>
-                      <a:endParaRPr lang="en-US" sz="1509" dirty="0">
+                      <a:endParaRPr lang="en-US" sz="1700" dirty="0">
                         <a:latin typeface="Roboto" charset="0"/>
                         <a:ea typeface="Roboto" charset="0"/>
                         <a:cs typeface="Roboto" charset="0"/>
                       </a:endParaRPr>
                     </a:p>
                   </a:txBody>
-                  <a:tcPr marL="90191" marR="90191" marT="90191" marB="90191" anchor="ctr">
+                  <a:tcPr marL="101600" marR="101600" marT="101600" marB="101600" anchor="ctr">
                     <a:lnL w="6350" cap="flat" cmpd="sng" algn="ctr">
                       <a:solidFill>
                         <a:srgbClr val="BFBFBF"/>
@@ -11488,7 +11488,7 @@
                         <a:buNone/>
                       </a:pPr>
                       <a:r>
-                        <a:rPr lang="en-US" sz="1509" dirty="0">
+                        <a:rPr lang="en-US" sz="1700" dirty="0">
                           <a:solidFill>
                             <a:srgbClr val="000000"/>
                           </a:solidFill>
@@ -11498,14 +11498,14 @@
                         </a:rPr>
                         <a:t>3,636,363</a:t>
                       </a:r>
-                      <a:endParaRPr lang="en-US" sz="1509" dirty="0">
+                      <a:endParaRPr lang="en-US" sz="1700" dirty="0">
                         <a:latin typeface="Roboto" charset="0"/>
                         <a:ea typeface="Roboto" charset="0"/>
                         <a:cs typeface="Roboto" charset="0"/>
                       </a:endParaRPr>
                     </a:p>
                   </a:txBody>
-                  <a:tcPr marL="90191" marR="90191" marT="90191" marB="90191" anchor="ctr">
+                  <a:tcPr marL="101600" marR="101600" marT="101600" marB="101600" anchor="ctr">
                     <a:lnL w="6350" cap="flat" cmpd="sng" algn="ctr">
                       <a:solidFill>
                         <a:srgbClr val="BFBFBF"/>
@@ -11556,7 +11556,7 @@
                         <a:buNone/>
                       </a:pPr>
                       <a:r>
-                        <a:rPr lang="en-US" sz="1509" dirty="0">
+                        <a:rPr lang="en-US" sz="1700" dirty="0">
                           <a:solidFill>
                             <a:srgbClr val="38761D"/>
                           </a:solidFill>
@@ -11566,14 +11566,14 @@
                         </a:rPr>
                         <a:t>1.5x</a:t>
                       </a:r>
-                      <a:endParaRPr lang="en-US" sz="1509" dirty="0">
+                      <a:endParaRPr lang="en-US" sz="1700" dirty="0">
                         <a:latin typeface="Roboto" charset="0"/>
                         <a:ea typeface="Roboto" charset="0"/>
                         <a:cs typeface="Roboto" charset="0"/>
                       </a:endParaRPr>
                     </a:p>
                   </a:txBody>
-                  <a:tcPr marL="90191" marR="90191" marT="90191" marB="90191" anchor="ctr">
+                  <a:tcPr marL="101600" marR="101600" marT="101600" marB="101600" anchor="ctr">
                     <a:lnL w="6350" cap="flat" cmpd="sng" algn="ctr">
                       <a:solidFill>
                         <a:srgbClr val="BFBFBF"/>
@@ -11626,7 +11626,7 @@
                         <a:buNone/>
                       </a:pPr>
                       <a:r>
-                        <a:rPr lang="en-US" sz="1509" dirty="0">
+                        <a:rPr lang="en-US" sz="1700" dirty="0">
                           <a:solidFill>
                             <a:srgbClr val="000000"/>
                           </a:solidFill>
@@ -11636,14 +11636,14 @@
                         </a:rPr>
                         <a:t>?s a ?c</a:t>
                       </a:r>
-                      <a:endParaRPr lang="en-US" sz="1509" dirty="0">
+                      <a:endParaRPr lang="en-US" sz="1700" dirty="0">
                         <a:latin typeface="Roboto" charset="0"/>
                         <a:ea typeface="Roboto" charset="0"/>
                         <a:cs typeface="Roboto" charset="0"/>
                       </a:endParaRPr>
                     </a:p>
                   </a:txBody>
-                  <a:tcPr marL="90191" marR="90191" marT="90191" marB="90191" anchor="ctr">
+                  <a:tcPr marL="101600" marR="101600" marT="101600" marB="101600" anchor="ctr">
                     <a:lnL w="6350" cap="flat" cmpd="sng" algn="ctr">
                       <a:solidFill>
                         <a:srgbClr val="BFBFBF"/>
@@ -11694,7 +11694,7 @@
                         <a:buNone/>
                       </a:pPr>
                       <a:r>
-                        <a:rPr lang="en-US" sz="1509" b="1" dirty="0">
+                        <a:rPr lang="en-US" sz="1700" b="1" dirty="0">
                           <a:solidFill>
                             <a:srgbClr val="000000"/>
                           </a:solidFill>
@@ -11704,14 +11704,14 @@
                         </a:rPr>
                         <a:t>8,513,437</a:t>
                       </a:r>
-                      <a:endParaRPr lang="en-US" sz="1509" dirty="0">
+                      <a:endParaRPr lang="en-US" sz="1700" dirty="0">
                         <a:latin typeface="Roboto" charset="0"/>
                         <a:ea typeface="Roboto" charset="0"/>
                         <a:cs typeface="Roboto" charset="0"/>
                       </a:endParaRPr>
                     </a:p>
                   </a:txBody>
-                  <a:tcPr marL="90191" marR="90191" marT="90191" marB="90191" anchor="ctr">
+                  <a:tcPr marL="101600" marR="101600" marT="101600" marB="101600" anchor="ctr">
                     <a:lnL w="6350" cap="flat" cmpd="sng" algn="ctr">
                       <a:solidFill>
                         <a:srgbClr val="BFBFBF"/>
@@ -11762,7 +11762,7 @@
                         <a:buNone/>
                       </a:pPr>
                       <a:r>
-                        <a:rPr lang="en-US" sz="1509" dirty="0">
+                        <a:rPr lang="en-US" sz="1700" dirty="0">
                           <a:solidFill>
                             <a:srgbClr val="000000"/>
                           </a:solidFill>
@@ -11772,14 +11772,14 @@
                         </a:rPr>
                         <a:t>4,864,821</a:t>
                       </a:r>
-                      <a:endParaRPr lang="en-US" sz="1509" dirty="0">
+                      <a:endParaRPr lang="en-US" sz="1700" dirty="0">
                         <a:latin typeface="Roboto" charset="0"/>
                         <a:ea typeface="Roboto" charset="0"/>
                         <a:cs typeface="Roboto" charset="0"/>
                       </a:endParaRPr>
                     </a:p>
                   </a:txBody>
-                  <a:tcPr marL="90191" marR="90191" marT="90191" marB="90191" anchor="ctr">
+                  <a:tcPr marL="101600" marR="101600" marT="101600" marB="101600" anchor="ctr">
                     <a:lnL w="6350" cap="flat" cmpd="sng" algn="ctr">
                       <a:solidFill>
                         <a:srgbClr val="BFBFBF"/>
@@ -11830,7 +11830,7 @@
                         <a:buNone/>
                       </a:pPr>
                       <a:r>
-                        <a:rPr lang="en-US" sz="1509" dirty="0">
+                        <a:rPr lang="en-US" sz="1700" dirty="0">
                           <a:solidFill>
                             <a:srgbClr val="38761D"/>
                           </a:solidFill>
@@ -11840,14 +11840,14 @@
                         </a:rPr>
                         <a:t>1.8x</a:t>
                       </a:r>
-                      <a:endParaRPr lang="en-US" sz="1509" dirty="0">
+                      <a:endParaRPr lang="en-US" sz="1700" dirty="0">
                         <a:latin typeface="Roboto" charset="0"/>
                         <a:ea typeface="Roboto" charset="0"/>
                         <a:cs typeface="Roboto" charset="0"/>
                       </a:endParaRPr>
                     </a:p>
                   </a:txBody>
-                  <a:tcPr marL="90191" marR="90191" marT="90191" marB="90191" anchor="ctr">
+                  <a:tcPr marL="101600" marR="101600" marT="101600" marB="101600" anchor="ctr">
                     <a:lnL w="6350" cap="flat" cmpd="sng" algn="ctr">
                       <a:solidFill>
                         <a:srgbClr val="BFBFBF"/>
@@ -11900,7 +11900,7 @@
                         <a:buNone/>
                       </a:pPr>
                       <a:r>
-                        <a:rPr lang="en-US" sz="1509" dirty="0">
+                        <a:rPr lang="en-US" sz="1700" dirty="0">
                           <a:solidFill>
                             <a:srgbClr val="000000"/>
                           </a:solidFill>
@@ -11910,14 +11910,14 @@
                         </a:rPr>
                         <a:t>their join</a:t>
                       </a:r>
-                      <a:endParaRPr lang="en-US" sz="1509" dirty="0">
+                      <a:endParaRPr lang="en-US" sz="1700" dirty="0">
                         <a:latin typeface="Roboto" charset="0"/>
                         <a:ea typeface="Roboto" charset="0"/>
                         <a:cs typeface="Roboto" charset="0"/>
                       </a:endParaRPr>
                     </a:p>
                   </a:txBody>
-                  <a:tcPr marL="90191" marR="90191" marT="90191" marB="90191" anchor="ctr">
+                  <a:tcPr marL="101600" marR="101600" marT="101600" marB="101600" anchor="ctr">
                     <a:lnL w="6350" cap="flat" cmpd="sng" algn="ctr">
                       <a:solidFill>
                         <a:srgbClr val="BFBFBF"/>
@@ -11968,7 +11968,7 @@
                         <a:buNone/>
                       </a:pPr>
                       <a:r>
-                        <a:rPr lang="en-US" sz="1509" dirty="0">
+                        <a:rPr lang="en-US" sz="1700" dirty="0">
                           <a:solidFill>
                             <a:srgbClr val="000000"/>
                           </a:solidFill>
@@ -11978,14 +11978,14 @@
                         </a:rPr>
                         <a:t>1,438,848</a:t>
                       </a:r>
-                      <a:endParaRPr lang="en-US" sz="1509" dirty="0">
+                      <a:endParaRPr lang="en-US" sz="1700" dirty="0">
                         <a:latin typeface="Roboto" charset="0"/>
                         <a:ea typeface="Roboto" charset="0"/>
                         <a:cs typeface="Roboto" charset="0"/>
                       </a:endParaRPr>
                     </a:p>
                   </a:txBody>
-                  <a:tcPr marL="90191" marR="90191" marT="90191" marB="90191" anchor="ctr">
+                  <a:tcPr marL="101600" marR="101600" marT="101600" marB="101600" anchor="ctr">
                     <a:lnL w="6350" cap="flat" cmpd="sng" algn="ctr">
                       <a:solidFill>
                         <a:srgbClr val="BFBFBF"/>
@@ -12036,7 +12036,7 @@
                         <a:buNone/>
                       </a:pPr>
                       <a:r>
-                        <a:rPr lang="en-US" sz="1509" b="1" dirty="0">
+                        <a:rPr lang="en-US" sz="1700" b="1" dirty="0">
                           <a:solidFill>
                             <a:srgbClr val="000000"/>
                           </a:solidFill>
@@ -12046,14 +12046,14 @@
                         </a:rPr>
                         <a:t>2,941,176</a:t>
                       </a:r>
-                      <a:endParaRPr lang="en-US" sz="1509" dirty="0">
+                      <a:endParaRPr lang="en-US" sz="1700" dirty="0">
                         <a:latin typeface="Roboto" charset="0"/>
                         <a:ea typeface="Roboto" charset="0"/>
                         <a:cs typeface="Roboto" charset="0"/>
                       </a:endParaRPr>
                     </a:p>
                   </a:txBody>
-                  <a:tcPr marL="90191" marR="90191" marT="90191" marB="90191" anchor="ctr">
+                  <a:tcPr marL="101600" marR="101600" marT="101600" marB="101600" anchor="ctr">
                     <a:lnL w="6350" cap="flat" cmpd="sng" algn="ctr">
                       <a:solidFill>
                         <a:srgbClr val="BFBFBF"/>
@@ -12104,7 +12104,7 @@
                         <a:buNone/>
                       </a:pPr>
                       <a:r>
-                        <a:rPr lang="en-US" sz="1509" dirty="0">
+                        <a:rPr lang="en-US" sz="1700" dirty="0">
                           <a:solidFill>
                             <a:srgbClr val="FF0000"/>
                           </a:solidFill>
@@ -12114,14 +12114,14 @@
                         </a:rPr>
                         <a:t>0.5x</a:t>
                       </a:r>
-                      <a:endParaRPr lang="en-US" sz="1509" dirty="0">
+                      <a:endParaRPr lang="en-US" sz="1700" dirty="0">
                         <a:latin typeface="Roboto" charset="0"/>
                         <a:ea typeface="Roboto" charset="0"/>
                         <a:cs typeface="Roboto" charset="0"/>
                       </a:endParaRPr>
                     </a:p>
                   </a:txBody>
-                  <a:tcPr marL="90191" marR="90191" marT="90191" marB="90191" anchor="ctr">
+                  <a:tcPr marL="101600" marR="101600" marT="101600" marB="101600" anchor="ctr">
                     <a:lnL w="6350" cap="flat" cmpd="sng" algn="ctr">
                       <a:solidFill>
                         <a:srgbClr val="BFBFBF"/>
@@ -12176,8 +12176,8 @@
         </p:nvSpPr>
         <p:spPr>
           <a:xfrm>
-            <a:off x="660400" y="4080502"/>
-            <a:ext cx="10566400" cy="579567"/>
+            <a:off x="660400" y="4424782"/>
+            <a:ext cx="10566400" cy="326441"/>
           </a:xfrm>
           <a:prstGeom prst="rect">
             <a:avLst/>
@@ -12196,7 +12196,7 @@
               <a:buNone/>
             </a:pPr>
             <a:r>
-              <a:rPr lang="en-US" sz="1509" b="1" dirty="0">
+              <a:rPr lang="en-US" sz="1700" b="1" dirty="0">
                 <a:solidFill>
                   <a:srgbClr val="000000"/>
                 </a:solidFill>
@@ -12213,15 +12213,15 @@
               <a:buNone/>
             </a:pPr>
             <a:r>
-              <a:rPr lang="en-US" sz="1509" dirty="0">
-                <a:solidFill>
-                  <a:srgbClr val="000000"/>
-                </a:solidFill>
-                <a:latin typeface="Roboto" pitchFamily="34" charset="0"/>
-                <a:ea typeface="Roboto" pitchFamily="34" charset="-122"/>
-                <a:cs typeface="Roboto" pitchFamily="34" charset="-120"/>
-              </a:rPr>
-              <a:t> — the join restricted to the least populated class has eight solutions on both. QLever holds the data in </a:t>
+              <a:rPr lang="en-US" sz="1700" dirty="0">
+                <a:solidFill>
+                  <a:srgbClr val="000000"/>
+                </a:solidFill>
+                <a:latin typeface="Roboto" pitchFamily="34" charset="0"/>
+                <a:ea typeface="Roboto" pitchFamily="34" charset="-122"/>
+                <a:cs typeface="Roboto" pitchFamily="34" charset="-120"/>
+              </a:rPr>
+              <a:t>, and QLever holds the data in </a:t>
             </a:r>
             <a:pPr algn="l" indent="0" marL="0">
               <a:lnSpc>
@@ -12230,7 +12230,7 @@
               <a:buNone/>
             </a:pPr>
             <a:r>
-              <a:rPr lang="en-US" sz="1509" b="1" dirty="0">
+              <a:rPr lang="en-US" sz="1700" b="1" dirty="0">
                 <a:solidFill>
                   <a:srgbClr val="000000"/>
                 </a:solidFill>
@@ -12247,7 +12247,7 @@
               <a:buNone/>
             </a:pPr>
             <a:r>
-              <a:rPr lang="en-US" sz="1509" dirty="0">
+              <a:rPr lang="en-US" sz="1700" dirty="0">
                 <a:solidFill>
                   <a:srgbClr val="000000"/>
                 </a:solidFill>
@@ -12264,7 +12264,7 @@
               <a:buNone/>
             </a:pPr>
             <a:r>
-              <a:rPr lang="en-US" sz="1509" b="1" dirty="0">
+              <a:rPr lang="en-US" sz="1700" b="1" dirty="0">
                 <a:solidFill>
                   <a:srgbClr val="000000"/>
                 </a:solidFill>
@@ -12281,7 +12281,7 @@
               <a:buNone/>
             </a:pPr>
             <a:r>
-              <a:rPr lang="en-US" sz="1509" dirty="0">
+              <a:rPr lang="en-US" sz="1700" dirty="0">
                 <a:solidFill>
                   <a:srgbClr val="000000"/>
                 </a:solidFill>
@@ -12291,7 +12291,7 @@
               </a:rPr>
               <a:t>.</a:t>
             </a:r>
-            <a:endParaRPr lang="en-US" sz="1509" dirty="0"/>
+            <a:endParaRPr lang="en-US" sz="1700" dirty="0"/>
           </a:p>
         </p:txBody>
       </p:sp>
@@ -12303,8 +12303,8 @@
         </p:nvSpPr>
         <p:spPr>
           <a:xfrm>
-            <a:off x="660400" y="4795356"/>
-            <a:ext cx="10566400" cy="579567"/>
+            <a:off x="660400" y="4903622"/>
+            <a:ext cx="10566400" cy="652882"/>
           </a:xfrm>
           <a:prstGeom prst="rect">
             <a:avLst/>
@@ -12323,15 +12323,15 @@
               <a:buNone/>
             </a:pPr>
             <a:r>
-              <a:rPr lang="en-US" sz="1509" dirty="0">
-                <a:solidFill>
-                  <a:srgbClr val="000000"/>
-                </a:solidFill>
-                <a:latin typeface="Roboto" pitchFamily="34" charset="0"/>
-                <a:ea typeface="Roboto" pitchFamily="34" charset="-122"/>
-                <a:cs typeface="Roboto" pitchFamily="34" charset="-120"/>
-              </a:rPr>
-              <a:t>QLever reads faster, Blazegraph joins faster: a join is a sequence of point lookups, which is what a B-tree is for and what a block-compressed store is not. That factor was </a:t>
+              <a:rPr lang="en-US" sz="1700" b="1" dirty="0">
+                <a:solidFill>
+                  <a:srgbClr val="000000"/>
+                </a:solidFill>
+                <a:latin typeface="Roboto" pitchFamily="34" charset="0"/>
+                <a:ea typeface="Roboto" pitchFamily="34" charset="-122"/>
+                <a:cs typeface="Roboto" pitchFamily="34" charset="-120"/>
+              </a:rPr>
+              <a:t>But the remaining 2x is not the storage.</a:t>
             </a:r>
             <a:pPr algn="l" indent="0" marL="0">
               <a:lnSpc>
@@ -12340,15 +12340,15 @@
               <a:buNone/>
             </a:pPr>
             <a:r>
-              <a:rPr lang="en-US" sz="1509" b="1" dirty="0">
-                <a:solidFill>
-                  <a:srgbClr val="000000"/>
-                </a:solidFill>
-                <a:latin typeface="Roboto" pitchFamily="34" charset="0"/>
-                <a:ea typeface="Roboto" pitchFamily="34" charset="-122"/>
-                <a:cs typeface="Roboto" pitchFamily="34" charset="-120"/>
-              </a:rPr>
-              <a:t>ninety-five</a:t>
+              <a:rPr lang="en-US" sz="1700" dirty="0">
+                <a:solidFill>
+                  <a:srgbClr val="000000"/>
+                </a:solidFill>
+                <a:latin typeface="Roboto" pitchFamily="34" charset="0"/>
+                <a:ea typeface="Roboto" pitchFamily="34" charset="-122"/>
+                <a:cs typeface="Roboto" pitchFamily="34" charset="-120"/>
+              </a:rPr>
+              <a:t> The same join reaches </a:t>
             </a:r>
             <a:pPr algn="l" indent="0" marL="0">
               <a:lnSpc>
@@ -12357,17 +12357,34 @@
               <a:buNone/>
             </a:pPr>
             <a:r>
-              <a:rPr lang="en-US" sz="1509" dirty="0">
-                <a:solidFill>
-                  <a:srgbClr val="000000"/>
-                </a:solidFill>
-                <a:latin typeface="Roboto" pitchFamily="34" charset="0"/>
-                <a:ea typeface="Roboto" pitchFamily="34" charset="-122"/>
-                <a:cs typeface="Roboto" pitchFamily="34" charset="-120"/>
-              </a:rPr>
-              <a:t> before the block cache.</a:t>
-            </a:r>
-            <a:endParaRPr lang="en-US" sz="1509" dirty="0"/>
+              <a:rPr lang="en-US" sz="1700" b="1" dirty="0">
+                <a:solidFill>
+                  <a:srgbClr val="000000"/>
+                </a:solidFill>
+                <a:latin typeface="Roboto" pitchFamily="34" charset="0"/>
+                <a:ea typeface="Roboto" pitchFamily="34" charset="-122"/>
+                <a:cs typeface="Roboto" pitchFamily="34" charset="-120"/>
+              </a:rPr>
+              <a:t>3.3 M/s in C++</a:t>
+            </a:r>
+            <a:pPr algn="l" indent="0" marL="0">
+              <a:lnSpc>
+                <a:spcPct val="140000"/>
+              </a:lnSpc>
+              <a:buNone/>
+            </a:pPr>
+            <a:r>
+              <a:rPr lang="en-US" sz="1700" dirty="0">
+                <a:solidFill>
+                  <a:srgbClr val="000000"/>
+                </a:solidFill>
+                <a:latin typeface="Roboto" pitchFamily="34" charset="0"/>
+                <a:ea typeface="Roboto" pitchFamily="34" charset="-122"/>
+                <a:cs typeface="Roboto" pitchFamily="34" charset="-120"/>
+              </a:rPr>
+              <a:t> against 1.95 M/s through JNI, and only QLever crosses a boundary.</a:t>
+            </a:r>
+            <a:endParaRPr lang="en-US" sz="1700" dirty="0"/>
           </a:p>
         </p:txBody>
       </p:sp>
@@ -12379,8 +12396,8 @@
         </p:nvSpPr>
         <p:spPr>
           <a:xfrm>
-            <a:off x="660400" y="5510209"/>
-            <a:ext cx="9906000" cy="584234"/>
+            <a:off x="660400" y="5708904"/>
+            <a:ext cx="9906000" cy="619582"/>
           </a:xfrm>
           <a:prstGeom prst="rect">
             <a:avLst/>
@@ -12403,7 +12420,7 @@
               <a:buNone/>
             </a:pPr>
             <a:r>
-              <a:rPr lang="en-US" sz="1509" dirty="0">
+              <a:rPr lang="en-US" sz="1700" dirty="0">
                 <a:solidFill>
                   <a:srgbClr val="000000"/>
                 </a:solidFill>
@@ -12420,7 +12437,7 @@
               <a:buNone/>
             </a:pPr>
             <a:r>
-              <a:rPr lang="en-US" sz="1509" b="1" dirty="0">
+              <a:rPr lang="en-US" sz="1700" b="1" dirty="0">
                 <a:solidFill>
                   <a:srgbClr val="000000"/>
                 </a:solidFill>
@@ -12437,7 +12454,7 @@
               <a:buNone/>
             </a:pPr>
             <a:r>
-              <a:rPr lang="en-US" sz="1509" dirty="0">
+              <a:rPr lang="en-US" sz="1700" dirty="0">
                 <a:solidFill>
                   <a:srgbClr val="000000"/>
                 </a:solidFill>
@@ -12447,7 +12464,7 @@
               </a:rPr>
               <a:t> the result: it replaces a dependency that has no future.</a:t>
             </a:r>
-            <a:endParaRPr lang="en-US" sz="1509" dirty="0"/>
+            <a:endParaRPr lang="en-US" sz="1700" dirty="0"/>
           </a:p>
         </p:txBody>
       </p:sp>
